--- a/slides/12-random-forest.pptx
+++ b/slides/12-random-forest.pptx
@@ -209,7 +209,7 @@
           <a:p>
             <a:fld id="{A5320152-7289-42ED-97D3-BBB411F9F8C0}" type="datetimeFigureOut">
               <a:rPr lang="en-US" smtClean="0"/>
-              <a:t>2/20/2026</a:t>
+              <a:t>2/26/2026</a:t>
             </a:fld>
             <a:endParaRPr lang="en-US"/>
           </a:p>
@@ -589,8 +589,8 @@
         </p:nvSpPr>
         <p:spPr/>
       </p:sp>
-      <mc:AlternateContent xmlns:mc="http://schemas.openxmlformats.org/markup-compatibility/2006">
-        <mc:Choice xmlns:a14="http://schemas.microsoft.com/office/drawing/2010/main" Requires="a14">
+      <mc:AlternateContent xmlns:mc="http://schemas.openxmlformats.org/markup-compatibility/2006" xmlns:a14="http://schemas.microsoft.com/office/drawing/2010/main">
+        <mc:Choice Requires="a14">
           <p:sp>
             <p:nvSpPr>
               <p:cNvPr id="3" name="Notes Placeholder 2"/>
@@ -612,6 +612,7 @@
                 </a:r>
               </a:p>
               <a:p>
+                <a:pPr/>
                 <a14:m>
                   <m:oMathPara xmlns:m="http://schemas.openxmlformats.org/officeDocument/2006/math">
                     <m:oMathParaPr>
@@ -626,7 +627,7 @@
                           <a:solidFill>
                             <a:schemeClr val="tx1"/>
                           </a:solidFill>
-                          <a:latin typeface="+mn-lt"/>
+                          <a:latin typeface="Cambria Math" panose="02040503050406030204" pitchFamily="18" charset="0"/>
                           <a:ea typeface="+mn-ea"/>
                           <a:cs typeface="+mn-cs"/>
                         </a:rPr>
@@ -637,7 +638,7 @@
                           <a:solidFill>
                             <a:schemeClr val="tx1"/>
                           </a:solidFill>
-                          <a:latin typeface="+mn-lt"/>
+                          <a:latin typeface="Cambria Math" panose="02040503050406030204" pitchFamily="18" charset="0"/>
                           <a:ea typeface="+mn-ea"/>
                           <a:cs typeface="+mn-cs"/>
                         </a:rPr>
@@ -650,7 +651,7 @@
                               <a:solidFill>
                                 <a:schemeClr val="tx1"/>
                               </a:solidFill>
-                              <a:latin typeface="+mn-lt"/>
+                              <a:latin typeface="Cambria Math" panose="02040503050406030204" pitchFamily="18" charset="0"/>
                               <a:ea typeface="+mn-ea"/>
                               <a:cs typeface="+mn-cs"/>
                             </a:rPr>
@@ -664,7 +665,7 @@
                                   <a:solidFill>
                                     <a:schemeClr val="tx1"/>
                                   </a:solidFill>
-                                  <a:latin typeface="+mn-lt"/>
+                                  <a:latin typeface="Cambria Math" panose="02040503050406030204" pitchFamily="18" charset="0"/>
                                   <a:ea typeface="+mn-ea"/>
                                   <a:cs typeface="+mn-cs"/>
                                 </a:rPr>
@@ -676,7 +677,7 @@
                                   <a:solidFill>
                                     <a:schemeClr val="tx1"/>
                                   </a:solidFill>
-                                  <a:latin typeface="+mn-lt"/>
+                                  <a:latin typeface="Cambria Math" panose="02040503050406030204" pitchFamily="18" charset="0"/>
                                   <a:ea typeface="+mn-ea"/>
                                   <a:cs typeface="+mn-cs"/>
                                 </a:rPr>
@@ -689,7 +690,7 @@
                                   <a:solidFill>
                                     <a:schemeClr val="tx1"/>
                                   </a:solidFill>
-                                  <a:latin typeface="+mn-lt"/>
+                                  <a:latin typeface="Cambria Math" panose="02040503050406030204" pitchFamily="18" charset="0"/>
                                   <a:ea typeface="+mn-ea"/>
                                   <a:cs typeface="+mn-cs"/>
                                 </a:rPr>
@@ -704,7 +705,7 @@
                           <a:solidFill>
                             <a:schemeClr val="tx1"/>
                           </a:solidFill>
-                          <a:latin typeface="+mn-lt"/>
+                          <a:latin typeface="Cambria Math" panose="02040503050406030204" pitchFamily="18" charset="0"/>
                           <a:ea typeface="+mn-ea"/>
                           <a:cs typeface="+mn-cs"/>
                         </a:rPr>
@@ -717,7 +718,7 @@
                               <a:solidFill>
                                 <a:schemeClr val="tx1"/>
                               </a:solidFill>
-                              <a:latin typeface="+mn-lt"/>
+                              <a:latin typeface="Cambria Math" panose="02040503050406030204" pitchFamily="18" charset="0"/>
                               <a:ea typeface="+mn-ea"/>
                               <a:cs typeface="+mn-cs"/>
                             </a:rPr>
@@ -729,7 +730,7 @@
                               <a:solidFill>
                                 <a:schemeClr val="tx1"/>
                               </a:solidFill>
-                              <a:latin typeface="+mn-lt"/>
+                              <a:latin typeface="Cambria Math" panose="02040503050406030204" pitchFamily="18" charset="0"/>
                               <a:ea typeface="+mn-ea"/>
                               <a:cs typeface="+mn-cs"/>
                             </a:rPr>
@@ -742,7 +743,7 @@
                               <a:solidFill>
                                 <a:schemeClr val="tx1"/>
                               </a:solidFill>
-                              <a:latin typeface="+mn-lt"/>
+                              <a:latin typeface="Cambria Math" panose="02040503050406030204" pitchFamily="18" charset="0"/>
                               <a:ea typeface="+mn-ea"/>
                               <a:cs typeface="+mn-cs"/>
                             </a:rPr>
@@ -756,6 +757,7 @@
                 <a:endParaRPr lang="ar-AE" dirty="0"/>
               </a:p>
               <a:p>
+                <a:pPr/>
                 <a14:m>
                   <m:oMathPara xmlns:m="http://schemas.openxmlformats.org/officeDocument/2006/math">
                     <m:oMathParaPr>
@@ -770,7 +772,7 @@
                           <a:solidFill>
                             <a:schemeClr val="tx1"/>
                           </a:solidFill>
-                          <a:latin typeface="+mn-lt"/>
+                          <a:latin typeface="Cambria Math" panose="02040503050406030204" pitchFamily="18" charset="0"/>
                           <a:ea typeface="+mn-ea"/>
                           <a:cs typeface="+mn-cs"/>
                         </a:rPr>
@@ -781,7 +783,7 @@
                           <a:solidFill>
                             <a:schemeClr val="tx1"/>
                           </a:solidFill>
-                          <a:latin typeface="+mn-lt"/>
+                          <a:latin typeface="Cambria Math" panose="02040503050406030204" pitchFamily="18" charset="0"/>
                           <a:ea typeface="+mn-ea"/>
                           <a:cs typeface="+mn-cs"/>
                         </a:rPr>
@@ -795,7 +797,7 @@
                               <a:solidFill>
                                 <a:schemeClr val="tx1"/>
                               </a:solidFill>
-                              <a:latin typeface="+mn-lt"/>
+                              <a:latin typeface="Cambria Math" panose="02040503050406030204" pitchFamily="18" charset="0"/>
                               <a:ea typeface="+mn-ea"/>
                               <a:cs typeface="+mn-cs"/>
                             </a:rPr>
@@ -809,7 +811,7 @@
                                   <a:solidFill>
                                     <a:schemeClr val="tx1"/>
                                   </a:solidFill>
-                                  <a:latin typeface="+mn-lt"/>
+                                  <a:latin typeface="Cambria Math" panose="02040503050406030204" pitchFamily="18" charset="0"/>
                                   <a:ea typeface="+mn-ea"/>
                                   <a:cs typeface="+mn-cs"/>
                                 </a:rPr>
@@ -821,7 +823,7 @@
                                   <a:solidFill>
                                     <a:schemeClr val="tx1"/>
                                   </a:solidFill>
-                                  <a:latin typeface="+mn-lt"/>
+                                  <a:latin typeface="Cambria Math" panose="02040503050406030204" pitchFamily="18" charset="0"/>
                                   <a:ea typeface="+mn-ea"/>
                                   <a:cs typeface="+mn-cs"/>
                                 </a:rPr>
@@ -834,7 +836,7 @@
                                   <a:solidFill>
                                     <a:schemeClr val="tx1"/>
                                   </a:solidFill>
-                                  <a:latin typeface="+mn-lt"/>
+                                  <a:latin typeface="Cambria Math" panose="02040503050406030204" pitchFamily="18" charset="0"/>
                                   <a:ea typeface="+mn-ea"/>
                                   <a:cs typeface="+mn-cs"/>
                                 </a:rPr>
@@ -851,7 +853,7 @@
                                   <a:solidFill>
                                     <a:schemeClr val="tx1"/>
                                   </a:solidFill>
-                                  <a:latin typeface="+mn-lt"/>
+                                  <a:latin typeface="Cambria Math" panose="02040503050406030204" pitchFamily="18" charset="0"/>
                                   <a:ea typeface="+mn-ea"/>
                                   <a:cs typeface="+mn-cs"/>
                                 </a:rPr>
@@ -863,7 +865,7 @@
                                   <a:solidFill>
                                     <a:schemeClr val="tx1"/>
                                   </a:solidFill>
-                                  <a:latin typeface="+mn-lt"/>
+                                  <a:latin typeface="Cambria Math" panose="02040503050406030204" pitchFamily="18" charset="0"/>
                                   <a:ea typeface="+mn-ea"/>
                                   <a:cs typeface="+mn-cs"/>
                                 </a:rPr>
@@ -876,7 +878,7 @@
                                   <a:solidFill>
                                     <a:schemeClr val="tx1"/>
                                   </a:solidFill>
-                                  <a:latin typeface="+mn-lt"/>
+                                  <a:latin typeface="Cambria Math" panose="02040503050406030204" pitchFamily="18" charset="0"/>
                                   <a:ea typeface="+mn-ea"/>
                                   <a:cs typeface="+mn-cs"/>
                                 </a:rPr>
@@ -891,7 +893,7 @@
                           <a:solidFill>
                             <a:schemeClr val="tx1"/>
                           </a:solidFill>
-                          <a:latin typeface="+mn-lt"/>
+                          <a:latin typeface="Cambria Math" panose="02040503050406030204" pitchFamily="18" charset="0"/>
                           <a:ea typeface="+mn-ea"/>
                           <a:cs typeface="+mn-cs"/>
                         </a:rPr>
@@ -902,7 +904,7 @@
                           <a:solidFill>
                             <a:schemeClr val="tx1"/>
                           </a:solidFill>
-                          <a:latin typeface="+mn-lt"/>
+                          <a:latin typeface="Cambria Math" panose="02040503050406030204" pitchFamily="18" charset="0"/>
                           <a:ea typeface="+mn-ea"/>
                           <a:cs typeface="+mn-cs"/>
                         </a:rPr>
@@ -915,7 +917,7 @@
                               <a:solidFill>
                                 <a:schemeClr val="tx1"/>
                               </a:solidFill>
-                              <a:latin typeface="+mn-lt"/>
+                              <a:latin typeface="Cambria Math" panose="02040503050406030204" pitchFamily="18" charset="0"/>
                               <a:ea typeface="+mn-ea"/>
                               <a:cs typeface="+mn-cs"/>
                             </a:rPr>
@@ -927,7 +929,7 @@
                               <a:solidFill>
                                 <a:schemeClr val="tx1"/>
                               </a:solidFill>
-                              <a:latin typeface="+mn-lt"/>
+                              <a:latin typeface="Cambria Math" panose="02040503050406030204" pitchFamily="18" charset="0"/>
                               <a:ea typeface="+mn-ea"/>
                               <a:cs typeface="+mn-cs"/>
                             </a:rPr>
@@ -940,7 +942,7 @@
                               <a:solidFill>
                                 <a:schemeClr val="tx1"/>
                               </a:solidFill>
-                              <a:latin typeface="+mn-lt"/>
+                              <a:latin typeface="Cambria Math" panose="02040503050406030204" pitchFamily="18" charset="0"/>
                               <a:ea typeface="+mn-ea"/>
                               <a:cs typeface="+mn-cs"/>
                             </a:rPr>
@@ -967,7 +969,7 @@
                         <a:solidFill>
                           <a:schemeClr val="tx1"/>
                         </a:solidFill>
-                        <a:latin typeface="+mn-lt"/>
+                        <a:latin typeface="Cambria Math" panose="02040503050406030204" pitchFamily="18" charset="0"/>
                         <a:ea typeface="+mn-ea"/>
                         <a:cs typeface="+mn-cs"/>
                       </a:rPr>
@@ -988,7 +990,7 @@
                         <a:solidFill>
                           <a:schemeClr val="tx1"/>
                         </a:solidFill>
-                        <a:latin typeface="+mn-lt"/>
+                        <a:latin typeface="Cambria Math" panose="02040503050406030204" pitchFamily="18" charset="0"/>
                         <a:ea typeface="+mn-ea"/>
                         <a:cs typeface="+mn-cs"/>
                       </a:rPr>
@@ -1001,7 +1003,7 @@
                             <a:solidFill>
                               <a:schemeClr val="tx1"/>
                             </a:solidFill>
-                            <a:latin typeface="+mn-lt"/>
+                            <a:latin typeface="Cambria Math" panose="02040503050406030204" pitchFamily="18" charset="0"/>
                             <a:ea typeface="+mn-ea"/>
                             <a:cs typeface="+mn-cs"/>
                           </a:rPr>
@@ -1013,7 +1015,7 @@
                             <a:solidFill>
                               <a:schemeClr val="tx1"/>
                             </a:solidFill>
-                            <a:latin typeface="+mn-lt"/>
+                            <a:latin typeface="Cambria Math" panose="02040503050406030204" pitchFamily="18" charset="0"/>
                             <a:ea typeface="+mn-ea"/>
                             <a:cs typeface="+mn-cs"/>
                           </a:rPr>
@@ -1024,7 +1026,7 @@
                             <a:solidFill>
                               <a:schemeClr val="tx1"/>
                             </a:solidFill>
-                            <a:latin typeface="+mn-lt"/>
+                            <a:latin typeface="Cambria Math" panose="02040503050406030204" pitchFamily="18" charset="0"/>
                             <a:ea typeface="+mn-ea"/>
                             <a:cs typeface="+mn-cs"/>
                           </a:rPr>
@@ -1035,7 +1037,7 @@
                             <a:solidFill>
                               <a:schemeClr val="tx1"/>
                             </a:solidFill>
-                            <a:latin typeface="+mn-lt"/>
+                            <a:latin typeface="Cambria Math" panose="02040503050406030204" pitchFamily="18" charset="0"/>
                             <a:ea typeface="+mn-ea"/>
                             <a:cs typeface="+mn-cs"/>
                           </a:rPr>
@@ -1057,6 +1059,7 @@
                 </a:r>
               </a:p>
               <a:p>
+                <a:pPr/>
                 <a14:m>
                   <m:oMathPara xmlns:m="http://schemas.openxmlformats.org/officeDocument/2006/math">
                     <m:oMathParaPr>
@@ -1068,7 +1071,7 @@
                           <a:solidFill>
                             <a:schemeClr val="tx1"/>
                           </a:solidFill>
-                          <a:latin typeface="+mn-lt"/>
+                          <a:latin typeface="Cambria Math" panose="02040503050406030204" pitchFamily="18" charset="0"/>
                           <a:ea typeface="+mn-ea"/>
                           <a:cs typeface="+mn-cs"/>
                         </a:rPr>
@@ -1079,7 +1082,7 @@
                           <a:solidFill>
                             <a:schemeClr val="tx1"/>
                           </a:solidFill>
-                          <a:latin typeface="+mn-lt"/>
+                          <a:latin typeface="Cambria Math" panose="02040503050406030204" pitchFamily="18" charset="0"/>
                           <a:ea typeface="+mn-ea"/>
                           <a:cs typeface="+mn-cs"/>
                         </a:rPr>
@@ -1092,7 +1095,7 @@
                               <a:solidFill>
                                 <a:schemeClr val="tx1"/>
                               </a:solidFill>
-                              <a:latin typeface="+mn-lt"/>
+                              <a:latin typeface="Cambria Math" panose="02040503050406030204" pitchFamily="18" charset="0"/>
                               <a:ea typeface="+mn-ea"/>
                               <a:cs typeface="+mn-cs"/>
                             </a:rPr>
@@ -1104,7 +1107,7 @@
                               <a:solidFill>
                                 <a:schemeClr val="tx1"/>
                               </a:solidFill>
-                              <a:latin typeface="+mn-lt"/>
+                              <a:latin typeface="Cambria Math" panose="02040503050406030204" pitchFamily="18" charset="0"/>
                               <a:ea typeface="+mn-ea"/>
                               <a:cs typeface="+mn-cs"/>
                             </a:rPr>
@@ -1117,7 +1120,7 @@
                               <a:solidFill>
                                 <a:schemeClr val="tx1"/>
                               </a:solidFill>
-                              <a:latin typeface="+mn-lt"/>
+                              <a:latin typeface="Cambria Math" panose="02040503050406030204" pitchFamily="18" charset="0"/>
                               <a:ea typeface="+mn-ea"/>
                               <a:cs typeface="+mn-cs"/>
                             </a:rPr>
@@ -1130,7 +1133,7 @@
                           <a:solidFill>
                             <a:schemeClr val="tx1"/>
                           </a:solidFill>
-                          <a:latin typeface="+mn-lt"/>
+                          <a:latin typeface="Cambria Math" panose="02040503050406030204" pitchFamily="18" charset="0"/>
                           <a:ea typeface="+mn-ea"/>
                           <a:cs typeface="+mn-cs"/>
                         </a:rPr>
@@ -1141,7 +1144,7 @@
                           <a:solidFill>
                             <a:schemeClr val="tx1"/>
                           </a:solidFill>
-                          <a:latin typeface="+mn-lt"/>
+                          <a:latin typeface="Cambria Math" panose="02040503050406030204" pitchFamily="18" charset="0"/>
                           <a:ea typeface="+mn-ea"/>
                           <a:cs typeface="+mn-cs"/>
                         </a:rPr>
@@ -1154,7 +1157,7 @@
                               <a:solidFill>
                                 <a:schemeClr val="tx1"/>
                               </a:solidFill>
-                              <a:latin typeface="+mn-lt"/>
+                              <a:latin typeface="Cambria Math" panose="02040503050406030204" pitchFamily="18" charset="0"/>
                               <a:ea typeface="+mn-ea"/>
                               <a:cs typeface="+mn-cs"/>
                             </a:rPr>
@@ -1166,7 +1169,7 @@
                               <a:solidFill>
                                 <a:schemeClr val="tx1"/>
                               </a:solidFill>
-                              <a:latin typeface="+mn-lt"/>
+                              <a:latin typeface="Cambria Math" panose="02040503050406030204" pitchFamily="18" charset="0"/>
                               <a:ea typeface="+mn-ea"/>
                               <a:cs typeface="+mn-cs"/>
                             </a:rPr>
@@ -1177,7 +1180,7 @@
                               <a:solidFill>
                                 <a:schemeClr val="tx1"/>
                               </a:solidFill>
-                              <a:latin typeface="+mn-lt"/>
+                              <a:latin typeface="Cambria Math" panose="02040503050406030204" pitchFamily="18" charset="0"/>
                               <a:ea typeface="+mn-ea"/>
                               <a:cs typeface="+mn-cs"/>
                             </a:rPr>
@@ -1188,7 +1191,7 @@
                               <a:solidFill>
                                 <a:schemeClr val="tx1"/>
                               </a:solidFill>
-                              <a:latin typeface="+mn-lt"/>
+                              <a:latin typeface="Cambria Math" panose="02040503050406030204" pitchFamily="18" charset="0"/>
                               <a:ea typeface="+mn-ea"/>
                               <a:cs typeface="+mn-cs"/>
                             </a:rPr>
@@ -1201,7 +1204,7 @@
                           <a:solidFill>
                             <a:schemeClr val="tx1"/>
                           </a:solidFill>
-                          <a:latin typeface="+mn-lt"/>
+                          <a:latin typeface="Cambria Math" panose="02040503050406030204" pitchFamily="18" charset="0"/>
                           <a:ea typeface="+mn-ea"/>
                           <a:cs typeface="+mn-cs"/>
                         </a:rPr>
@@ -1214,7 +1217,7 @@
                               <a:solidFill>
                                 <a:schemeClr val="tx1"/>
                               </a:solidFill>
-                              <a:latin typeface="+mn-lt"/>
+                              <a:latin typeface="Cambria Math" panose="02040503050406030204" pitchFamily="18" charset="0"/>
                               <a:ea typeface="+mn-ea"/>
                               <a:cs typeface="+mn-cs"/>
                             </a:rPr>
@@ -1226,7 +1229,7 @@
                               <a:solidFill>
                                 <a:schemeClr val="tx1"/>
                               </a:solidFill>
-                              <a:latin typeface="+mn-lt"/>
+                              <a:latin typeface="Cambria Math" panose="02040503050406030204" pitchFamily="18" charset="0"/>
                               <a:ea typeface="+mn-ea"/>
                               <a:cs typeface="+mn-cs"/>
                             </a:rPr>
@@ -1239,7 +1242,7 @@
                               <a:solidFill>
                                 <a:schemeClr val="tx1"/>
                               </a:solidFill>
-                              <a:latin typeface="+mn-lt"/>
+                              <a:latin typeface="Cambria Math" panose="02040503050406030204" pitchFamily="18" charset="0"/>
                               <a:ea typeface="+mn-ea"/>
                               <a:cs typeface="+mn-cs"/>
                             </a:rPr>
@@ -1262,11 +1265,11 @@
                     <m:sSup>
                       <m:sSupPr>
                         <m:ctrlPr>
-                          <a:rPr lang="ar-AE" sz="1200" kern="1200">
+                          <a:rPr lang="ar-AE" sz="1200" i="1" kern="1200">
                             <a:solidFill>
                               <a:schemeClr val="tx1"/>
                             </a:solidFill>
-                            <a:latin typeface="+mn-lt"/>
+                            <a:latin typeface="Cambria Math" panose="02040503050406030204" pitchFamily="18" charset="0"/>
                             <a:ea typeface="+mn-ea"/>
                             <a:cs typeface="+mn-cs"/>
                           </a:rPr>
@@ -1278,7 +1281,7 @@
                             <a:solidFill>
                               <a:schemeClr val="tx1"/>
                             </a:solidFill>
-                            <a:latin typeface="+mn-lt"/>
+                            <a:latin typeface="Cambria Math" panose="02040503050406030204" pitchFamily="18" charset="0"/>
                             <a:ea typeface="+mn-ea"/>
                             <a:cs typeface="+mn-cs"/>
                           </a:rPr>
@@ -1291,7 +1294,7 @@
                             <a:solidFill>
                               <a:schemeClr val="tx1"/>
                             </a:solidFill>
-                            <a:latin typeface="+mn-lt"/>
+                            <a:latin typeface="Cambria Math" panose="02040503050406030204" pitchFamily="18" charset="0"/>
                             <a:ea typeface="+mn-ea"/>
                             <a:cs typeface="+mn-cs"/>
                           </a:rPr>
@@ -1307,6 +1310,7 @@
                 </a:r>
               </a:p>
               <a:p>
+                <a:pPr/>
                 <a14:m>
                   <m:oMathPara xmlns:m="http://schemas.openxmlformats.org/officeDocument/2006/math">
                     <m:oMathParaPr>
@@ -1321,7 +1325,7 @@
                           <a:solidFill>
                             <a:schemeClr val="tx1"/>
                           </a:solidFill>
-                          <a:latin typeface="+mn-lt"/>
+                          <a:latin typeface="Cambria Math" panose="02040503050406030204" pitchFamily="18" charset="0"/>
                           <a:ea typeface="+mn-ea"/>
                           <a:cs typeface="+mn-cs"/>
                         </a:rPr>
@@ -1332,7 +1336,7 @@
                           <a:solidFill>
                             <a:schemeClr val="tx1"/>
                           </a:solidFill>
-                          <a:latin typeface="+mn-lt"/>
+                          <a:latin typeface="Cambria Math" panose="02040503050406030204" pitchFamily="18" charset="0"/>
                           <a:ea typeface="+mn-ea"/>
                           <a:cs typeface="+mn-cs"/>
                         </a:rPr>
@@ -1345,7 +1349,7 @@
                               <a:solidFill>
                                 <a:schemeClr val="tx1"/>
                               </a:solidFill>
-                              <a:latin typeface="+mn-lt"/>
+                              <a:latin typeface="Cambria Math" panose="02040503050406030204" pitchFamily="18" charset="0"/>
                               <a:ea typeface="+mn-ea"/>
                               <a:cs typeface="+mn-cs"/>
                             </a:rPr>
@@ -1359,7 +1363,7 @@
                                   <a:solidFill>
                                     <a:schemeClr val="tx1"/>
                                   </a:solidFill>
-                                  <a:latin typeface="+mn-lt"/>
+                                  <a:latin typeface="Cambria Math" panose="02040503050406030204" pitchFamily="18" charset="0"/>
                                   <a:ea typeface="+mn-ea"/>
                                   <a:cs typeface="+mn-cs"/>
                                 </a:rPr>
@@ -1371,7 +1375,7 @@
                                   <a:solidFill>
                                     <a:schemeClr val="tx1"/>
                                   </a:solidFill>
-                                  <a:latin typeface="+mn-lt"/>
+                                  <a:latin typeface="Cambria Math" panose="02040503050406030204" pitchFamily="18" charset="0"/>
                                   <a:ea typeface="+mn-ea"/>
                                   <a:cs typeface="+mn-cs"/>
                                 </a:rPr>
@@ -1384,7 +1388,7 @@
                                   <a:solidFill>
                                     <a:schemeClr val="tx1"/>
                                   </a:solidFill>
-                                  <a:latin typeface="+mn-lt"/>
+                                  <a:latin typeface="Cambria Math" panose="02040503050406030204" pitchFamily="18" charset="0"/>
                                   <a:ea typeface="+mn-ea"/>
                                   <a:cs typeface="+mn-cs"/>
                                 </a:rPr>
@@ -1399,7 +1403,7 @@
                           <a:solidFill>
                             <a:schemeClr val="tx1"/>
                           </a:solidFill>
-                          <a:latin typeface="+mn-lt"/>
+                          <a:latin typeface="Cambria Math" panose="02040503050406030204" pitchFamily="18" charset="0"/>
                           <a:ea typeface="+mn-ea"/>
                           <a:cs typeface="+mn-cs"/>
                         </a:rPr>
@@ -1412,7 +1416,7 @@
                               <a:solidFill>
                                 <a:schemeClr val="tx1"/>
                               </a:solidFill>
-                              <a:latin typeface="+mn-lt"/>
+                              <a:latin typeface="Cambria Math" panose="02040503050406030204" pitchFamily="18" charset="0"/>
                               <a:ea typeface="+mn-ea"/>
                               <a:cs typeface="+mn-cs"/>
                             </a:rPr>
@@ -1424,7 +1428,7 @@
                               <a:solidFill>
                                 <a:schemeClr val="tx1"/>
                               </a:solidFill>
-                              <a:latin typeface="+mn-lt"/>
+                              <a:latin typeface="Cambria Math" panose="02040503050406030204" pitchFamily="18" charset="0"/>
                               <a:ea typeface="+mn-ea"/>
                               <a:cs typeface="+mn-cs"/>
                             </a:rPr>
@@ -1437,7 +1441,7 @@
                                   <a:solidFill>
                                     <a:schemeClr val="tx1"/>
                                   </a:solidFill>
-                                  <a:latin typeface="+mn-lt"/>
+                                  <a:latin typeface="Cambria Math" panose="02040503050406030204" pitchFamily="18" charset="0"/>
                                   <a:ea typeface="+mn-ea"/>
                                   <a:cs typeface="+mn-cs"/>
                                 </a:rPr>
@@ -1449,7 +1453,7 @@
                                   <a:solidFill>
                                     <a:schemeClr val="tx1"/>
                                   </a:solidFill>
-                                  <a:latin typeface="+mn-lt"/>
+                                  <a:latin typeface="Cambria Math" panose="02040503050406030204" pitchFamily="18" charset="0"/>
                                   <a:ea typeface="+mn-ea"/>
                                   <a:cs typeface="+mn-cs"/>
                                 </a:rPr>
@@ -1462,7 +1466,7 @@
                                   <a:solidFill>
                                     <a:schemeClr val="tx1"/>
                                   </a:solidFill>
-                                  <a:latin typeface="+mn-lt"/>
+                                  <a:latin typeface="Cambria Math" panose="02040503050406030204" pitchFamily="18" charset="0"/>
                                   <a:ea typeface="+mn-ea"/>
                                   <a:cs typeface="+mn-cs"/>
                                 </a:rPr>
@@ -1479,7 +1483,7 @@
                                   <a:solidFill>
                                     <a:schemeClr val="tx1"/>
                                   </a:solidFill>
-                                  <a:latin typeface="+mn-lt"/>
+                                  <a:latin typeface="Cambria Math" panose="02040503050406030204" pitchFamily="18" charset="0"/>
                                   <a:ea typeface="+mn-ea"/>
                                   <a:cs typeface="+mn-cs"/>
                                 </a:rPr>
@@ -1491,7 +1495,7 @@
                                   <a:solidFill>
                                     <a:schemeClr val="tx1"/>
                                   </a:solidFill>
-                                  <a:latin typeface="+mn-lt"/>
+                                  <a:latin typeface="Cambria Math" panose="02040503050406030204" pitchFamily="18" charset="0"/>
                                   <a:ea typeface="+mn-ea"/>
                                   <a:cs typeface="+mn-cs"/>
                                 </a:rPr>
@@ -1504,7 +1508,7 @@
                                   <a:solidFill>
                                     <a:schemeClr val="tx1"/>
                                   </a:solidFill>
-                                  <a:latin typeface="+mn-lt"/>
+                                  <a:latin typeface="Cambria Math" panose="02040503050406030204" pitchFamily="18" charset="0"/>
                                   <a:ea typeface="+mn-ea"/>
                                   <a:cs typeface="+mn-cs"/>
                                 </a:rPr>
@@ -1519,7 +1523,7 @@
                           <a:solidFill>
                             <a:schemeClr val="tx1"/>
                           </a:solidFill>
-                          <a:latin typeface="+mn-lt"/>
+                          <a:latin typeface="Cambria Math" panose="02040503050406030204" pitchFamily="18" charset="0"/>
                           <a:ea typeface="+mn-ea"/>
                           <a:cs typeface="+mn-cs"/>
                         </a:rPr>
@@ -1532,7 +1536,7 @@
                               <a:solidFill>
                                 <a:schemeClr val="tx1"/>
                               </a:solidFill>
-                              <a:latin typeface="+mn-lt"/>
+                              <a:latin typeface="Cambria Math" panose="02040503050406030204" pitchFamily="18" charset="0"/>
                               <a:ea typeface="+mn-ea"/>
                               <a:cs typeface="+mn-cs"/>
                             </a:rPr>
@@ -1544,7 +1548,7 @@
                               <a:solidFill>
                                 <a:schemeClr val="tx1"/>
                               </a:solidFill>
-                              <a:latin typeface="+mn-lt"/>
+                              <a:latin typeface="Cambria Math" panose="02040503050406030204" pitchFamily="18" charset="0"/>
                               <a:ea typeface="+mn-ea"/>
                               <a:cs typeface="+mn-cs"/>
                             </a:rPr>
@@ -1557,7 +1561,7 @@
                                   <a:solidFill>
                                     <a:schemeClr val="tx1"/>
                                   </a:solidFill>
-                                  <a:latin typeface="+mn-lt"/>
+                                  <a:latin typeface="Cambria Math" panose="02040503050406030204" pitchFamily="18" charset="0"/>
                                   <a:ea typeface="+mn-ea"/>
                                   <a:cs typeface="+mn-cs"/>
                                 </a:rPr>
@@ -1569,7 +1573,7 @@
                                   <a:solidFill>
                                     <a:schemeClr val="tx1"/>
                                   </a:solidFill>
-                                  <a:latin typeface="+mn-lt"/>
+                                  <a:latin typeface="Cambria Math" panose="02040503050406030204" pitchFamily="18" charset="0"/>
                                   <a:ea typeface="+mn-ea"/>
                                   <a:cs typeface="+mn-cs"/>
                                 </a:rPr>
@@ -1580,7 +1584,7 @@
                                   <a:solidFill>
                                     <a:schemeClr val="tx1"/>
                                   </a:solidFill>
-                                  <a:latin typeface="+mn-lt"/>
+                                  <a:latin typeface="Cambria Math" panose="02040503050406030204" pitchFamily="18" charset="0"/>
                                   <a:ea typeface="+mn-ea"/>
                                   <a:cs typeface="+mn-cs"/>
                                 </a:rPr>
@@ -1591,7 +1595,7 @@
                                   <a:solidFill>
                                     <a:schemeClr val="tx1"/>
                                   </a:solidFill>
-                                  <a:latin typeface="+mn-lt"/>
+                                  <a:latin typeface="Cambria Math" panose="02040503050406030204" pitchFamily="18" charset="0"/>
                                   <a:ea typeface="+mn-ea"/>
                                   <a:cs typeface="+mn-cs"/>
                                 </a:rPr>
@@ -1604,7 +1608,7 @@
                               <a:solidFill>
                                 <a:schemeClr val="tx1"/>
                               </a:solidFill>
-                              <a:latin typeface="+mn-lt"/>
+                              <a:latin typeface="Cambria Math" panose="02040503050406030204" pitchFamily="18" charset="0"/>
                               <a:ea typeface="+mn-ea"/>
                               <a:cs typeface="+mn-cs"/>
                             </a:rPr>
@@ -1617,7 +1621,7 @@
                                   <a:solidFill>
                                     <a:schemeClr val="tx1"/>
                                   </a:solidFill>
-                                  <a:latin typeface="+mn-lt"/>
+                                  <a:latin typeface="Cambria Math" panose="02040503050406030204" pitchFamily="18" charset="0"/>
                                   <a:ea typeface="+mn-ea"/>
                                   <a:cs typeface="+mn-cs"/>
                                 </a:rPr>
@@ -1629,7 +1633,7 @@
                                   <a:solidFill>
                                     <a:schemeClr val="tx1"/>
                                   </a:solidFill>
-                                  <a:latin typeface="+mn-lt"/>
+                                  <a:latin typeface="Cambria Math" panose="02040503050406030204" pitchFamily="18" charset="0"/>
                                   <a:ea typeface="+mn-ea"/>
                                   <a:cs typeface="+mn-cs"/>
                                 </a:rPr>
@@ -1642,7 +1646,7 @@
                                   <a:solidFill>
                                     <a:schemeClr val="tx1"/>
                                   </a:solidFill>
-                                  <a:latin typeface="+mn-lt"/>
+                                  <a:latin typeface="Cambria Math" panose="02040503050406030204" pitchFamily="18" charset="0"/>
                                   <a:ea typeface="+mn-ea"/>
                                   <a:cs typeface="+mn-cs"/>
                                 </a:rPr>
@@ -1659,7 +1663,7 @@
                                   <a:solidFill>
                                     <a:schemeClr val="tx1"/>
                                   </a:solidFill>
-                                  <a:latin typeface="+mn-lt"/>
+                                  <a:latin typeface="Cambria Math" panose="02040503050406030204" pitchFamily="18" charset="0"/>
                                   <a:ea typeface="+mn-ea"/>
                                   <a:cs typeface="+mn-cs"/>
                                 </a:rPr>
@@ -1671,7 +1675,7 @@
                                   <a:solidFill>
                                     <a:schemeClr val="tx1"/>
                                   </a:solidFill>
-                                  <a:latin typeface="+mn-lt"/>
+                                  <a:latin typeface="Cambria Math" panose="02040503050406030204" pitchFamily="18" charset="0"/>
                                   <a:ea typeface="+mn-ea"/>
                                   <a:cs typeface="+mn-cs"/>
                                 </a:rPr>
@@ -1684,7 +1688,7 @@
                                   <a:solidFill>
                                     <a:schemeClr val="tx1"/>
                                   </a:solidFill>
-                                  <a:latin typeface="+mn-lt"/>
+                                  <a:latin typeface="Cambria Math" panose="02040503050406030204" pitchFamily="18" charset="0"/>
                                   <a:ea typeface="+mn-ea"/>
                                   <a:cs typeface="+mn-cs"/>
                                 </a:rPr>
@@ -1706,6 +1710,7 @@
                 </a:r>
               </a:p>
               <a:p>
+                <a:pPr/>
                 <a14:m>
                   <m:oMathPara xmlns:m="http://schemas.openxmlformats.org/officeDocument/2006/math">
                     <m:oMathParaPr>
@@ -1717,7 +1722,7 @@
                           <a:solidFill>
                             <a:schemeClr val="tx1"/>
                           </a:solidFill>
-                          <a:latin typeface="+mn-lt"/>
+                          <a:latin typeface="Cambria Math" panose="02040503050406030204" pitchFamily="18" charset="0"/>
                           <a:ea typeface="+mn-ea"/>
                           <a:cs typeface="+mn-cs"/>
                         </a:rPr>
@@ -1730,7 +1735,7 @@
                               <a:solidFill>
                                 <a:schemeClr val="tx1"/>
                               </a:solidFill>
-                              <a:latin typeface="+mn-lt"/>
+                              <a:latin typeface="Cambria Math" panose="02040503050406030204" pitchFamily="18" charset="0"/>
                               <a:ea typeface="+mn-ea"/>
                               <a:cs typeface="+mn-cs"/>
                             </a:rPr>
@@ -1744,7 +1749,7 @@
                                   <a:solidFill>
                                     <a:schemeClr val="tx1"/>
                                   </a:solidFill>
-                                  <a:latin typeface="+mn-lt"/>
+                                  <a:latin typeface="Cambria Math" panose="02040503050406030204" pitchFamily="18" charset="0"/>
                                   <a:ea typeface="+mn-ea"/>
                                   <a:cs typeface="+mn-cs"/>
                                 </a:rPr>
@@ -1756,7 +1761,7 @@
                                   <a:solidFill>
                                     <a:schemeClr val="tx1"/>
                                   </a:solidFill>
-                                  <a:latin typeface="+mn-lt"/>
+                                  <a:latin typeface="Cambria Math" panose="02040503050406030204" pitchFamily="18" charset="0"/>
                                   <a:ea typeface="+mn-ea"/>
                                   <a:cs typeface="+mn-cs"/>
                                 </a:rPr>
@@ -1769,7 +1774,7 @@
                                   <a:solidFill>
                                     <a:schemeClr val="tx1"/>
                                   </a:solidFill>
-                                  <a:latin typeface="+mn-lt"/>
+                                  <a:latin typeface="Cambria Math" panose="02040503050406030204" pitchFamily="18" charset="0"/>
                                   <a:ea typeface="+mn-ea"/>
                                   <a:cs typeface="+mn-cs"/>
                                 </a:rPr>
@@ -1784,7 +1789,7 @@
                               <a:solidFill>
                                 <a:schemeClr val="tx1"/>
                               </a:solidFill>
-                              <a:latin typeface="+mn-lt"/>
+                              <a:latin typeface="Cambria Math" panose="02040503050406030204" pitchFamily="18" charset="0"/>
                               <a:ea typeface="+mn-ea"/>
                               <a:cs typeface="+mn-cs"/>
                             </a:rPr>
@@ -1797,7 +1802,7 @@
                           <a:solidFill>
                             <a:schemeClr val="tx1"/>
                           </a:solidFill>
-                          <a:latin typeface="+mn-lt"/>
+                          <a:latin typeface="Cambria Math" panose="02040503050406030204" pitchFamily="18" charset="0"/>
                           <a:ea typeface="+mn-ea"/>
                           <a:cs typeface="+mn-cs"/>
                         </a:rPr>
@@ -1808,7 +1813,7 @@
                           <a:solidFill>
                             <a:schemeClr val="tx1"/>
                           </a:solidFill>
-                          <a:latin typeface="+mn-lt"/>
+                          <a:latin typeface="Cambria Math" panose="02040503050406030204" pitchFamily="18" charset="0"/>
                           <a:ea typeface="+mn-ea"/>
                           <a:cs typeface="+mn-cs"/>
                         </a:rPr>
@@ -1821,7 +1826,7 @@
                               <a:solidFill>
                                 <a:schemeClr val="tx1"/>
                               </a:solidFill>
-                              <a:latin typeface="+mn-lt"/>
+                              <a:latin typeface="Cambria Math" panose="02040503050406030204" pitchFamily="18" charset="0"/>
                               <a:ea typeface="+mn-ea"/>
                               <a:cs typeface="+mn-cs"/>
                             </a:rPr>
@@ -1833,7 +1838,7 @@
                               <a:solidFill>
                                 <a:schemeClr val="tx1"/>
                               </a:solidFill>
-                              <a:latin typeface="+mn-lt"/>
+                              <a:latin typeface="Cambria Math" panose="02040503050406030204" pitchFamily="18" charset="0"/>
                               <a:ea typeface="+mn-ea"/>
                               <a:cs typeface="+mn-cs"/>
                             </a:rPr>
@@ -1846,7 +1851,7 @@
                               <a:solidFill>
                                 <a:schemeClr val="tx1"/>
                               </a:solidFill>
-                              <a:latin typeface="+mn-lt"/>
+                              <a:latin typeface="Cambria Math" panose="02040503050406030204" pitchFamily="18" charset="0"/>
                               <a:ea typeface="+mn-ea"/>
                               <a:cs typeface="+mn-cs"/>
                             </a:rPr>
@@ -1861,7 +1866,7 @@
                               <a:solidFill>
                                 <a:schemeClr val="tx1"/>
                               </a:solidFill>
-                              <a:latin typeface="+mn-lt"/>
+                              <a:latin typeface="Cambria Math" panose="02040503050406030204" pitchFamily="18" charset="0"/>
                               <a:ea typeface="+mn-ea"/>
                               <a:cs typeface="+mn-cs"/>
                             </a:rPr>
@@ -1873,7 +1878,7 @@
                               <a:solidFill>
                                 <a:schemeClr val="tx1"/>
                               </a:solidFill>
-                              <a:latin typeface="+mn-lt"/>
+                              <a:latin typeface="Cambria Math" panose="02040503050406030204" pitchFamily="18" charset="0"/>
                               <a:ea typeface="+mn-ea"/>
                               <a:cs typeface="+mn-cs"/>
                             </a:rPr>
@@ -1884,7 +1889,7 @@
                               <a:solidFill>
                                 <a:schemeClr val="tx1"/>
                               </a:solidFill>
-                              <a:latin typeface="+mn-lt"/>
+                              <a:latin typeface="Cambria Math" panose="02040503050406030204" pitchFamily="18" charset="0"/>
                               <a:ea typeface="+mn-ea"/>
                               <a:cs typeface="+mn-cs"/>
                             </a:rPr>
@@ -1895,7 +1900,7 @@
                               <a:solidFill>
                                 <a:schemeClr val="tx1"/>
                               </a:solidFill>
-                              <a:latin typeface="+mn-lt"/>
+                              <a:latin typeface="Cambria Math" panose="02040503050406030204" pitchFamily="18" charset="0"/>
                               <a:ea typeface="+mn-ea"/>
                               <a:cs typeface="+mn-cs"/>
                             </a:rPr>
@@ -1908,7 +1913,7 @@
                               <a:solidFill>
                                 <a:schemeClr val="tx1"/>
                               </a:solidFill>
-                              <a:latin typeface="+mn-lt"/>
+                              <a:latin typeface="Cambria Math" panose="02040503050406030204" pitchFamily="18" charset="0"/>
                               <a:ea typeface="+mn-ea"/>
                               <a:cs typeface="+mn-cs"/>
                             </a:rPr>
@@ -1928,6 +1933,7 @@
                 </a:r>
               </a:p>
               <a:p>
+                <a:pPr/>
                 <a14:m>
                   <m:oMathPara xmlns:m="http://schemas.openxmlformats.org/officeDocument/2006/math">
                     <m:oMathParaPr>
@@ -1937,11 +1943,11 @@
                       <m:borderBox>
                         <m:borderBoxPr>
                           <m:ctrlPr>
-                            <a:rPr lang="ar-AE" sz="1200" kern="1200">
+                            <a:rPr lang="ar-AE" sz="1200" i="1" kern="1200">
                               <a:solidFill>
                                 <a:schemeClr val="tx1"/>
                               </a:solidFill>
-                              <a:latin typeface="+mn-lt"/>
+                              <a:latin typeface="Cambria Math" panose="02040503050406030204" pitchFamily="18" charset="0"/>
                               <a:ea typeface="+mn-ea"/>
                               <a:cs typeface="+mn-cs"/>
                             </a:rPr>
@@ -1956,7 +1962,7 @@
                               <a:solidFill>
                                 <a:schemeClr val="tx1"/>
                               </a:solidFill>
-                              <a:latin typeface="+mn-lt"/>
+                              <a:latin typeface="Cambria Math" panose="02040503050406030204" pitchFamily="18" charset="0"/>
                               <a:ea typeface="+mn-ea"/>
                               <a:cs typeface="+mn-cs"/>
                             </a:rPr>
@@ -1967,7 +1973,7 @@
                               <a:solidFill>
                                 <a:schemeClr val="tx1"/>
                               </a:solidFill>
-                              <a:latin typeface="+mn-lt"/>
+                              <a:latin typeface="Cambria Math" panose="02040503050406030204" pitchFamily="18" charset="0"/>
                               <a:ea typeface="+mn-ea"/>
                               <a:cs typeface="+mn-cs"/>
                             </a:rPr>
@@ -1980,7 +1986,7 @@
                                   <a:solidFill>
                                     <a:schemeClr val="tx1"/>
                                   </a:solidFill>
-                                  <a:latin typeface="+mn-lt"/>
+                                  <a:latin typeface="Cambria Math" panose="02040503050406030204" pitchFamily="18" charset="0"/>
                                   <a:ea typeface="+mn-ea"/>
                                   <a:cs typeface="+mn-cs"/>
                                 </a:rPr>
@@ -1994,7 +2000,7 @@
                                       <a:solidFill>
                                         <a:schemeClr val="tx1"/>
                                       </a:solidFill>
-                                      <a:latin typeface="+mn-lt"/>
+                                      <a:latin typeface="Cambria Math" panose="02040503050406030204" pitchFamily="18" charset="0"/>
                                       <a:ea typeface="+mn-ea"/>
                                       <a:cs typeface="+mn-cs"/>
                                     </a:rPr>
@@ -2006,7 +2012,7 @@
                                       <a:solidFill>
                                         <a:schemeClr val="tx1"/>
                                       </a:solidFill>
-                                      <a:latin typeface="+mn-lt"/>
+                                      <a:latin typeface="Cambria Math" panose="02040503050406030204" pitchFamily="18" charset="0"/>
                                       <a:ea typeface="+mn-ea"/>
                                       <a:cs typeface="+mn-cs"/>
                                     </a:rPr>
@@ -2019,7 +2025,7 @@
                                       <a:solidFill>
                                         <a:schemeClr val="tx1"/>
                                       </a:solidFill>
-                                      <a:latin typeface="+mn-lt"/>
+                                      <a:latin typeface="Cambria Math" panose="02040503050406030204" pitchFamily="18" charset="0"/>
                                       <a:ea typeface="+mn-ea"/>
                                       <a:cs typeface="+mn-cs"/>
                                     </a:rPr>
@@ -2034,7 +2040,7 @@
                               <a:solidFill>
                                 <a:schemeClr val="tx1"/>
                               </a:solidFill>
-                              <a:latin typeface="+mn-lt"/>
+                              <a:latin typeface="Cambria Math" panose="02040503050406030204" pitchFamily="18" charset="0"/>
                               <a:ea typeface="+mn-ea"/>
                               <a:cs typeface="+mn-cs"/>
                             </a:rPr>
@@ -2045,7 +2051,7 @@
                               <a:solidFill>
                                 <a:schemeClr val="tx1"/>
                               </a:solidFill>
-                              <a:latin typeface="+mn-lt"/>
+                              <a:latin typeface="Cambria Math" panose="02040503050406030204" pitchFamily="18" charset="0"/>
                               <a:ea typeface="+mn-ea"/>
                               <a:cs typeface="+mn-cs"/>
                             </a:rPr>
@@ -2058,7 +2064,7 @@
                                   <a:solidFill>
                                     <a:schemeClr val="tx1"/>
                                   </a:solidFill>
-                                  <a:latin typeface="+mn-lt"/>
+                                  <a:latin typeface="Cambria Math" panose="02040503050406030204" pitchFamily="18" charset="0"/>
                                   <a:ea typeface="+mn-ea"/>
                                   <a:cs typeface="+mn-cs"/>
                                 </a:rPr>
@@ -2070,7 +2076,7 @@
                                   <a:solidFill>
                                     <a:schemeClr val="tx1"/>
                                   </a:solidFill>
-                                  <a:latin typeface="+mn-lt"/>
+                                  <a:latin typeface="Cambria Math" panose="02040503050406030204" pitchFamily="18" charset="0"/>
                                   <a:ea typeface="+mn-ea"/>
                                   <a:cs typeface="+mn-cs"/>
                                 </a:rPr>
@@ -2083,7 +2089,7 @@
                                   <a:solidFill>
                                     <a:schemeClr val="tx1"/>
                                   </a:solidFill>
-                                  <a:latin typeface="+mn-lt"/>
+                                  <a:latin typeface="Cambria Math" panose="02040503050406030204" pitchFamily="18" charset="0"/>
                                   <a:ea typeface="+mn-ea"/>
                                   <a:cs typeface="+mn-cs"/>
                                 </a:rPr>
@@ -2096,7 +2102,7 @@
                               <a:solidFill>
                                 <a:schemeClr val="tx1"/>
                               </a:solidFill>
-                              <a:latin typeface="+mn-lt"/>
+                              <a:latin typeface="Cambria Math" panose="02040503050406030204" pitchFamily="18" charset="0"/>
                               <a:ea typeface="+mn-ea"/>
                               <a:cs typeface="+mn-cs"/>
                             </a:rPr>
@@ -2109,7 +2115,7 @@
                                   <a:solidFill>
                                     <a:schemeClr val="tx1"/>
                                   </a:solidFill>
-                                  <a:latin typeface="+mn-lt"/>
+                                  <a:latin typeface="Cambria Math" panose="02040503050406030204" pitchFamily="18" charset="0"/>
                                   <a:ea typeface="+mn-ea"/>
                                   <a:cs typeface="+mn-cs"/>
                                 </a:rPr>
@@ -2121,7 +2127,7 @@
                                   <a:solidFill>
                                     <a:schemeClr val="tx1"/>
                                   </a:solidFill>
-                                  <a:latin typeface="+mn-lt"/>
+                                  <a:latin typeface="Cambria Math" panose="02040503050406030204" pitchFamily="18" charset="0"/>
                                   <a:ea typeface="+mn-ea"/>
                                   <a:cs typeface="+mn-cs"/>
                                 </a:rPr>
@@ -2132,7 +2138,7 @@
                                   <a:solidFill>
                                     <a:schemeClr val="tx1"/>
                                   </a:solidFill>
-                                  <a:latin typeface="+mn-lt"/>
+                                  <a:latin typeface="Cambria Math" panose="02040503050406030204" pitchFamily="18" charset="0"/>
                                   <a:ea typeface="+mn-ea"/>
                                   <a:cs typeface="+mn-cs"/>
                                 </a:rPr>
@@ -2143,7 +2149,7 @@
                                   <a:solidFill>
                                     <a:schemeClr val="tx1"/>
                                   </a:solidFill>
-                                  <a:latin typeface="+mn-lt"/>
+                                  <a:latin typeface="Cambria Math" panose="02040503050406030204" pitchFamily="18" charset="0"/>
                                   <a:ea typeface="+mn-ea"/>
                                   <a:cs typeface="+mn-cs"/>
                                 </a:rPr>
@@ -2156,7 +2162,7 @@
                                   <a:solidFill>
                                     <a:schemeClr val="tx1"/>
                                   </a:solidFill>
-                                  <a:latin typeface="+mn-lt"/>
+                                  <a:latin typeface="Cambria Math" panose="02040503050406030204" pitchFamily="18" charset="0"/>
                                   <a:ea typeface="+mn-ea"/>
                                   <a:cs typeface="+mn-cs"/>
                                 </a:rPr>
@@ -2171,7 +2177,7 @@
                                   <a:solidFill>
                                     <a:schemeClr val="tx1"/>
                                   </a:solidFill>
-                                  <a:latin typeface="+mn-lt"/>
+                                  <a:latin typeface="Cambria Math" panose="02040503050406030204" pitchFamily="18" charset="0"/>
                                   <a:ea typeface="+mn-ea"/>
                                   <a:cs typeface="+mn-cs"/>
                                 </a:rPr>
@@ -2183,7 +2189,7 @@
                                   <a:solidFill>
                                     <a:schemeClr val="tx1"/>
                                   </a:solidFill>
-                                  <a:latin typeface="+mn-lt"/>
+                                  <a:latin typeface="Cambria Math" panose="02040503050406030204" pitchFamily="18" charset="0"/>
                                   <a:ea typeface="+mn-ea"/>
                                   <a:cs typeface="+mn-cs"/>
                                 </a:rPr>
@@ -2196,7 +2202,7 @@
                                   <a:solidFill>
                                     <a:schemeClr val="tx1"/>
                                   </a:solidFill>
-                                  <a:latin typeface="+mn-lt"/>
+                                  <a:latin typeface="Cambria Math" panose="02040503050406030204" pitchFamily="18" charset="0"/>
                                   <a:ea typeface="+mn-ea"/>
                                   <a:cs typeface="+mn-cs"/>
                                 </a:rPr>
@@ -2217,7 +2223,7 @@
             </p:txBody>
           </p:sp>
         </mc:Choice>
-        <mc:Fallback>
+        <mc:Fallback xmlns="">
           <p:sp>
             <p:nvSpPr>
               <p:cNvPr id="3" name="Notes Placeholder 2"/>
@@ -2685,7 +2691,7 @@
           <a:p>
             <a:fld id="{D1D1EADE-8E88-4C7C-8AC5-FB148DE4940E}" type="datetime1">
               <a:rPr lang="en-US" smtClean="0"/>
-              <a:t>2/20/2026</a:t>
+              <a:t>2/26/2026</a:t>
             </a:fld>
             <a:endParaRPr lang="en-US"/>
           </a:p>
@@ -2885,7 +2891,7 @@
           <a:p>
             <a:fld id="{EC3C8B9C-477D-492A-96AD-1FC2CC997A73}" type="datetime1">
               <a:rPr lang="en-US" smtClean="0"/>
-              <a:t>2/20/2026</a:t>
+              <a:t>2/26/2026</a:t>
             </a:fld>
             <a:endParaRPr lang="en-US"/>
           </a:p>
@@ -3095,7 +3101,7 @@
           <a:p>
             <a:fld id="{42D3AED5-E26D-4E29-B1B3-7847B6779594}" type="datetime1">
               <a:rPr lang="en-US" smtClean="0"/>
-              <a:t>2/20/2026</a:t>
+              <a:t>2/26/2026</a:t>
             </a:fld>
             <a:endParaRPr lang="en-US"/>
           </a:p>
@@ -3418,7 +3424,7 @@
           <a:p>
             <a:fld id="{157B6794-849E-4626-908B-D15793550EFB}" type="datetime1">
               <a:rPr lang="en-US" smtClean="0"/>
-              <a:t>2/20/2026</a:t>
+              <a:t>2/26/2026</a:t>
             </a:fld>
             <a:endParaRPr lang="en-US"/>
           </a:p>
@@ -3694,7 +3700,7 @@
           <a:p>
             <a:fld id="{63DB64E7-5594-42A3-ADBF-E95A7ACEAD64}" type="datetime1">
               <a:rPr lang="en-US" smtClean="0"/>
-              <a:t>2/20/2026</a:t>
+              <a:t>2/26/2026</a:t>
             </a:fld>
             <a:endParaRPr lang="en-US"/>
           </a:p>
@@ -3967,7 +3973,7 @@
           <a:p>
             <a:fld id="{18462B0B-D248-4FFB-8695-AD7FA4B1284A}" type="datetime1">
               <a:rPr lang="en-US" smtClean="0"/>
-              <a:t>2/20/2026</a:t>
+              <a:t>2/26/2026</a:t>
             </a:fld>
             <a:endParaRPr lang="en-US"/>
           </a:p>
@@ -4390,7 +4396,7 @@
           <a:p>
             <a:fld id="{D0378EFB-9159-4510-B73F-4F0409ADE937}" type="datetime1">
               <a:rPr lang="en-US" smtClean="0"/>
-              <a:t>2/20/2026</a:t>
+              <a:t>2/26/2026</a:t>
             </a:fld>
             <a:endParaRPr lang="en-US"/>
           </a:p>
@@ -4532,7 +4538,7 @@
           <a:p>
             <a:fld id="{89BC9412-2452-4BED-A324-9D8C115361AD}" type="datetime1">
               <a:rPr lang="en-US" smtClean="0"/>
-              <a:t>2/20/2026</a:t>
+              <a:t>2/26/2026</a:t>
             </a:fld>
             <a:endParaRPr lang="en-US"/>
           </a:p>
@@ -4645,7 +4651,7 @@
           <a:p>
             <a:fld id="{F5318F62-D251-40E8-A23C-F4CFE9FEAB41}" type="datetime1">
               <a:rPr lang="en-US" smtClean="0"/>
-              <a:t>2/20/2026</a:t>
+              <a:t>2/26/2026</a:t>
             </a:fld>
             <a:endParaRPr lang="en-US"/>
           </a:p>
@@ -4958,7 +4964,7 @@
           <a:p>
             <a:fld id="{44F76144-149E-4874-93A5-554A0357CF82}" type="datetime1">
               <a:rPr lang="en-US" smtClean="0"/>
-              <a:t>2/20/2026</a:t>
+              <a:t>2/26/2026</a:t>
             </a:fld>
             <a:endParaRPr lang="en-US"/>
           </a:p>
@@ -5251,7 +5257,7 @@
           <a:p>
             <a:fld id="{50BA65D8-0540-4835-AE5C-25D29DBA01BE}" type="datetime1">
               <a:rPr lang="en-US" smtClean="0"/>
-              <a:t>2/20/2026</a:t>
+              <a:t>2/26/2026</a:t>
             </a:fld>
             <a:endParaRPr lang="en-US"/>
           </a:p>
@@ -5493,7 +5499,7 @@
           <a:p>
             <a:fld id="{E31BA835-12AC-4E8F-955A-EA3F4DE2791F}" type="datetime1">
               <a:rPr lang="en-US" smtClean="0"/>
-              <a:t>2/20/2026</a:t>
+              <a:t>2/26/2026</a:t>
             </a:fld>
             <a:endParaRPr lang="en-US"/>
           </a:p>
@@ -6469,8 +6475,8 @@
           <a:chExt cx="0" cy="0"/>
         </a:xfrm>
       </p:grpSpPr>
-      <mc:AlternateContent xmlns:mc="http://schemas.openxmlformats.org/markup-compatibility/2006">
-        <mc:Choice xmlns:a14="http://schemas.microsoft.com/office/drawing/2010/main" Requires="a14">
+      <mc:AlternateContent xmlns:mc="http://schemas.openxmlformats.org/markup-compatibility/2006" xmlns:a14="http://schemas.microsoft.com/office/drawing/2010/main">
+        <mc:Choice Requires="a14">
           <p:sp>
             <p:nvSpPr>
               <p:cNvPr id="290" name="It can be shown that in a bootstrap sample, on average 2/3 of the instances are included…"/>
@@ -6599,16 +6605,7 @@
                             </a:solidFill>
                             <a:latin typeface="Cambria Math" panose="02040503050406030204" pitchFamily="18" charset="0"/>
                           </a:rPr>
-                          <m:t>𝑡</m:t>
-                        </m:r>
-                        <m:r>
-                          <a:rPr sz="2074" i="1">
-                            <a:solidFill>
-                              <a:srgbClr val="000000"/>
-                            </a:solidFill>
-                            <a:latin typeface="Cambria Math" panose="02040503050406030204" pitchFamily="18" charset="0"/>
-                          </a:rPr>
-                          <m:t>h</m:t>
+                          <m:t>𝑡h</m:t>
                         </m:r>
                       </m:sup>
                     </m:sSup>
@@ -6715,7 +6712,7 @@
             </p:txBody>
           </p:sp>
         </mc:Choice>
-        <mc:Fallback>
+        <mc:Fallback xmlns="">
           <p:sp>
             <p:nvSpPr>
               <p:cNvPr id="290" name="It can be shown that in a bootstrap sample, on average 2/3 of the instances are included…"/>
@@ -7289,7 +7286,15 @@
                 </a:r>
                 <a:r>
                   <a:rPr lang="en-US" dirty="0"/>
-                  <a:t>be independent random variable each with variance </a:t>
+                  <a:t>be </a:t>
+                </a:r>
+                <a:r>
+                  <a:rPr lang="en-US" dirty="0" err="1"/>
+                  <a:t>i.i.d.</a:t>
+                </a:r>
+                <a:r>
+                  <a:rPr lang="en-US" dirty="0"/>
+                  <a:t> random variable each with variance </a:t>
                 </a:r>
                 <a14:m>
                   <m:oMath xmlns:m="http://schemas.openxmlformats.org/officeDocument/2006/math">
@@ -8302,7 +8307,7 @@
           </a:ln>
           <a:extLst>
             <a:ext uri="{C572A759-6A51-4108-AA02-DFA0A04FC94B}">
-              <ma14:wrappingTextBoxFlag xmlns="" xmlns:m="http://schemas.openxmlformats.org/officeDocument/2006/math" xmlns:a14="http://schemas.microsoft.com/office/drawing/2010/main" xmlns:ma14="http://schemas.microsoft.com/office/mac/drawingml/2011/main" val="1"/>
+              <ma14:wrappingTextBoxFlag xmlns:ma14="http://schemas.microsoft.com/office/mac/drawingml/2011/main" xmlns:a14="http://schemas.microsoft.com/office/drawing/2010/main" xmlns:m="http://schemas.openxmlformats.org/officeDocument/2006/math" xmlns="" val="1"/>
             </a:ext>
           </a:extLst>
         </p:spPr>
@@ -8453,8 +8458,8 @@
           <a:chExt cx="0" cy="0"/>
         </a:xfrm>
       </p:grpSpPr>
-      <mc:AlternateContent xmlns:mc="http://schemas.openxmlformats.org/markup-compatibility/2006">
-        <mc:Choice xmlns:a14="http://schemas.microsoft.com/office/drawing/2010/main" Requires="a14">
+      <mc:AlternateContent xmlns:mc="http://schemas.openxmlformats.org/markup-compatibility/2006" xmlns:a14="http://schemas.microsoft.com/office/drawing/2010/main">
+        <mc:Choice Requires="a14">
           <p:sp>
             <p:nvSpPr>
               <p:cNvPr id="278" name="The reduction in variance isn’t as strong when variables are correlated…"/>
@@ -8846,7 +8851,7 @@
             </p:txBody>
           </p:sp>
         </mc:Choice>
-        <mc:Fallback>
+        <mc:Fallback xmlns="">
           <p:sp>
             <p:nvSpPr>
               <p:cNvPr id="278" name="The reduction in variance isn’t as strong when variables are correlated…"/>
@@ -8953,8 +8958,8 @@
           <a:chExt cx="0" cy="0"/>
         </a:xfrm>
       </p:grpSpPr>
-      <mc:AlternateContent xmlns:mc="http://schemas.openxmlformats.org/markup-compatibility/2006">
-        <mc:Choice xmlns:a14="http://schemas.microsoft.com/office/drawing/2010/main" Requires="a14">
+      <mc:AlternateContent xmlns:mc="http://schemas.openxmlformats.org/markup-compatibility/2006" xmlns:a14="http://schemas.microsoft.com/office/drawing/2010/main">
+        <mc:Choice Requires="a14">
           <p:sp>
             <p:nvSpPr>
               <p:cNvPr id="2" name="Text Placeholder 1">
@@ -8985,41 +8990,55 @@
                     <m:sSub>
                       <m:sSubPr>
                         <m:ctrlPr>
-                          <a:rPr lang="ar-AE"/>
+                          <a:rPr lang="ar-AE" i="1">
+                            <a:latin typeface="Cambria Math" panose="02040503050406030204" pitchFamily="18" charset="0"/>
+                          </a:rPr>
                         </m:ctrlPr>
                       </m:sSubPr>
                       <m:e>
                         <m:r>
-                          <a:rPr lang="ar-AE" i="1"/>
+                          <a:rPr lang="ar-AE" i="1">
+                            <a:latin typeface="Cambria Math" panose="02040503050406030204" pitchFamily="18" charset="0"/>
+                          </a:rPr>
                           <m:t>𝑇</m:t>
                         </m:r>
                       </m:e>
                       <m:sub>
                         <m:r>
-                          <a:rPr lang="ar-AE"/>
+                          <a:rPr lang="ar-AE">
+                            <a:latin typeface="Cambria Math" panose="02040503050406030204" pitchFamily="18" charset="0"/>
+                          </a:rPr>
                           <m:t>1</m:t>
                         </m:r>
                       </m:sub>
                     </m:sSub>
                     <m:r>
-                      <a:rPr lang="ar-AE"/>
+                      <a:rPr lang="ar-AE">
+                        <a:latin typeface="Cambria Math" panose="02040503050406030204" pitchFamily="18" charset="0"/>
+                      </a:rPr>
                       <m:t>,…,</m:t>
                     </m:r>
                     <m:sSub>
                       <m:sSubPr>
                         <m:ctrlPr>
-                          <a:rPr lang="ar-AE" i="1"/>
+                          <a:rPr lang="ar-AE" i="1">
+                            <a:latin typeface="Cambria Math" panose="02040503050406030204" pitchFamily="18" charset="0"/>
+                          </a:rPr>
                         </m:ctrlPr>
                       </m:sSubPr>
                       <m:e>
                         <m:r>
-                          <a:rPr lang="ar-AE" i="1"/>
+                          <a:rPr lang="ar-AE" i="1">
+                            <a:latin typeface="Cambria Math" panose="02040503050406030204" pitchFamily="18" charset="0"/>
+                          </a:rPr>
                           <m:t>𝑇</m:t>
                         </m:r>
                       </m:e>
                       <m:sub>
                         <m:r>
-                          <a:rPr lang="ar-AE" i="1"/>
+                          <a:rPr lang="ar-AE" i="1">
+                            <a:latin typeface="Cambria Math" panose="02040503050406030204" pitchFamily="18" charset="0"/>
+                          </a:rPr>
                           <m:t>𝑀</m:t>
                         </m:r>
                       </m:sub>
@@ -9033,7 +9052,9 @@
                 <a14:m>
                   <m:oMath xmlns:m="http://schemas.openxmlformats.org/officeDocument/2006/math">
                     <m:r>
-                      <a:rPr lang="en-US" i="1"/>
+                      <a:rPr lang="en-US" i="1">
+                        <a:latin typeface="Cambria Math" panose="02040503050406030204" pitchFamily="18" charset="0"/>
+                      </a:rPr>
                       <m:t>𝑀</m:t>
                     </m:r>
                   </m:oMath>
@@ -9045,7 +9066,9 @@
                 <a14:m>
                   <m:oMath xmlns:m="http://schemas.openxmlformats.org/officeDocument/2006/math">
                     <m:r>
-                      <a:rPr lang="en-US" i="1"/>
+                      <a:rPr lang="en-US" i="1">
+                        <a:latin typeface="Cambria Math" panose="02040503050406030204" pitchFamily="18" charset="0"/>
+                      </a:rPr>
                       <m:t>𝑥</m:t>
                     </m:r>
                   </m:oMath>
@@ -9135,59 +9158,79 @@
                     <m:sSup>
                       <m:sSupPr>
                         <m:ctrlPr>
-                          <a:rPr lang="ar-AE"/>
+                          <a:rPr lang="ar-AE" i="1">
+                            <a:latin typeface="Cambria Math" panose="02040503050406030204" pitchFamily="18" charset="0"/>
+                          </a:rPr>
                         </m:ctrlPr>
                       </m:sSupPr>
                       <m:e>
                         <m:r>
-                          <a:rPr lang="ar-AE" i="1"/>
+                          <a:rPr lang="ar-AE" i="1">
+                            <a:latin typeface="Cambria Math" panose="02040503050406030204" pitchFamily="18" charset="0"/>
+                          </a:rPr>
                           <m:t>𝜎</m:t>
                         </m:r>
                       </m:e>
                       <m:sup>
                         <m:r>
-                          <a:rPr lang="ar-AE"/>
+                          <a:rPr lang="ar-AE">
+                            <a:latin typeface="Cambria Math" panose="02040503050406030204" pitchFamily="18" charset="0"/>
+                          </a:rPr>
                           <m:t>2</m:t>
                         </m:r>
                       </m:sup>
                     </m:sSup>
                     <m:r>
-                      <a:rPr lang="ar-AE"/>
+                      <a:rPr lang="ar-AE">
+                        <a:latin typeface="Cambria Math" panose="02040503050406030204" pitchFamily="18" charset="0"/>
+                      </a:rPr>
                       <m:t>=</m:t>
                     </m:r>
                     <m:r>
                       <m:rPr>
                         <m:sty m:val="p"/>
                       </m:rPr>
-                      <a:rPr lang="en-US"/>
+                      <a:rPr lang="en-US">
+                        <a:latin typeface="Cambria Math" panose="02040503050406030204" pitchFamily="18" charset="0"/>
+                      </a:rPr>
                       <m:t>Var</m:t>
                     </m:r>
                     <m:r>
-                      <a:rPr lang="en-US"/>
+                      <a:rPr lang="en-US">
+                        <a:latin typeface="Cambria Math" panose="02040503050406030204" pitchFamily="18" charset="0"/>
+                      </a:rPr>
                       <m:t>⁡</m:t>
                     </m:r>
                     <m:d>
                       <m:dPr>
                         <m:ctrlPr>
-                          <a:rPr lang="ar-AE" i="1"/>
+                          <a:rPr lang="ar-AE" i="1">
+                            <a:latin typeface="Cambria Math" panose="02040503050406030204" pitchFamily="18" charset="0"/>
+                          </a:rPr>
                         </m:ctrlPr>
                       </m:dPr>
                       <m:e>
                         <m:sSub>
                           <m:sSubPr>
                             <m:ctrlPr>
-                              <a:rPr lang="ar-AE" i="1"/>
+                              <a:rPr lang="ar-AE" i="1">
+                                <a:latin typeface="Cambria Math" panose="02040503050406030204" pitchFamily="18" charset="0"/>
+                              </a:rPr>
                             </m:ctrlPr>
                           </m:sSubPr>
                           <m:e>
                             <m:r>
-                              <a:rPr lang="ar-AE" i="1"/>
+                              <a:rPr lang="ar-AE" i="1">
+                                <a:latin typeface="Cambria Math" panose="02040503050406030204" pitchFamily="18" charset="0"/>
+                              </a:rPr>
                               <m:t>𝑇</m:t>
                             </m:r>
                           </m:e>
                           <m:sub>
                             <m:r>
-                              <a:rPr lang="ar-AE" i="1"/>
+                              <a:rPr lang="ar-AE" i="1">
+                                <a:latin typeface="Cambria Math" panose="02040503050406030204" pitchFamily="18" charset="0"/>
+                              </a:rPr>
                               <m:t>𝑖</m:t>
                             </m:r>
                           </m:sub>
@@ -9206,47 +9249,63 @@
                 <a14:m>
                   <m:oMath xmlns:m="http://schemas.openxmlformats.org/officeDocument/2006/math">
                     <m:r>
-                      <a:rPr lang="en-US" i="1"/>
+                      <a:rPr lang="en-US" i="1">
+                        <a:latin typeface="Cambria Math" panose="02040503050406030204" pitchFamily="18" charset="0"/>
+                      </a:rPr>
                       <m:t>𝜌</m:t>
                     </m:r>
                     <m:r>
-                      <a:rPr lang="en-US"/>
+                      <a:rPr lang="en-US">
+                        <a:latin typeface="Cambria Math" panose="02040503050406030204" pitchFamily="18" charset="0"/>
+                      </a:rPr>
                       <m:t>=</m:t>
                     </m:r>
                     <m:r>
                       <m:rPr>
                         <m:sty m:val="p"/>
                       </m:rPr>
-                      <a:rPr lang="en-US"/>
+                      <a:rPr lang="en-US">
+                        <a:latin typeface="Cambria Math" panose="02040503050406030204" pitchFamily="18" charset="0"/>
+                      </a:rPr>
                       <m:t>Corr</m:t>
                     </m:r>
                     <m:r>
-                      <a:rPr lang="en-US"/>
+                      <a:rPr lang="en-US">
+                        <a:latin typeface="Cambria Math" panose="02040503050406030204" pitchFamily="18" charset="0"/>
+                      </a:rPr>
                       <m:t>⁡</m:t>
                     </m:r>
                     <m:d>
                       <m:dPr>
                         <m:sepChr m:val=","/>
                         <m:ctrlPr>
-                          <a:rPr lang="ar-AE" i="1"/>
+                          <a:rPr lang="ar-AE" i="1">
+                            <a:latin typeface="Cambria Math" panose="02040503050406030204" pitchFamily="18" charset="0"/>
+                          </a:rPr>
                         </m:ctrlPr>
                       </m:dPr>
                       <m:e>
                         <m:sSub>
                           <m:sSubPr>
                             <m:ctrlPr>
-                              <a:rPr lang="ar-AE" i="1"/>
+                              <a:rPr lang="ar-AE" i="1">
+                                <a:latin typeface="Cambria Math" panose="02040503050406030204" pitchFamily="18" charset="0"/>
+                              </a:rPr>
                             </m:ctrlPr>
                           </m:sSubPr>
                           <m:e>
                             <m:r>
-                              <a:rPr lang="ar-AE" i="1"/>
+                              <a:rPr lang="ar-AE" i="1">
+                                <a:latin typeface="Cambria Math" panose="02040503050406030204" pitchFamily="18" charset="0"/>
+                              </a:rPr>
                               <m:t>𝑇</m:t>
                             </m:r>
                           </m:e>
                           <m:sub>
                             <m:r>
-                              <a:rPr lang="ar-AE" i="1"/>
+                              <a:rPr lang="ar-AE" i="1">
+                                <a:latin typeface="Cambria Math" panose="02040503050406030204" pitchFamily="18" charset="0"/>
+                              </a:rPr>
                               <m:t>𝑖</m:t>
                             </m:r>
                           </m:sub>
@@ -9256,18 +9315,24 @@
                         <m:sSub>
                           <m:sSubPr>
                             <m:ctrlPr>
-                              <a:rPr lang="ar-AE" i="1"/>
+                              <a:rPr lang="ar-AE" i="1">
+                                <a:latin typeface="Cambria Math" panose="02040503050406030204" pitchFamily="18" charset="0"/>
+                              </a:rPr>
                             </m:ctrlPr>
                           </m:sSubPr>
                           <m:e>
                             <m:r>
-                              <a:rPr lang="ar-AE" i="1"/>
+                              <a:rPr lang="ar-AE" i="1">
+                                <a:latin typeface="Cambria Math" panose="02040503050406030204" pitchFamily="18" charset="0"/>
+                              </a:rPr>
                               <m:t>𝑇</m:t>
                             </m:r>
                           </m:e>
                           <m:sub>
                             <m:r>
-                              <a:rPr lang="ar-AE" i="1"/>
+                              <a:rPr lang="ar-AE" i="1">
+                                <a:latin typeface="Cambria Math" panose="02040503050406030204" pitchFamily="18" charset="0"/>
+                              </a:rPr>
                               <m:t>𝑗</m:t>
                             </m:r>
                           </m:sub>
@@ -9283,15 +9348,21 @@
                 <a14:m>
                   <m:oMath xmlns:m="http://schemas.openxmlformats.org/officeDocument/2006/math">
                     <m:r>
-                      <a:rPr lang="en-US" i="1"/>
+                      <a:rPr lang="en-US" i="1">
+                        <a:latin typeface="Cambria Math" panose="02040503050406030204" pitchFamily="18" charset="0"/>
+                      </a:rPr>
                       <m:t>𝑖</m:t>
                     </m:r>
                     <m:r>
-                      <a:rPr lang="en-US"/>
+                      <a:rPr lang="en-US">
+                        <a:latin typeface="Cambria Math" panose="02040503050406030204" pitchFamily="18" charset="0"/>
+                      </a:rPr>
                       <m:t>≠</m:t>
                     </m:r>
                     <m:r>
-                      <a:rPr lang="en-US" i="1"/>
+                      <a:rPr lang="en-US" i="1">
+                        <a:latin typeface="Cambria Math" panose="02040503050406030204" pitchFamily="18" charset="0"/>
+                      </a:rPr>
                       <m:t>𝑗</m:t>
                     </m:r>
                   </m:oMath>
@@ -9438,7 +9509,7 @@
             </p:txBody>
           </p:sp>
         </mc:Choice>
-        <mc:Fallback>
+        <mc:Fallback xmlns="">
           <p:sp>
             <p:nvSpPr>
               <p:cNvPr id="2" name="Text Placeholder 1">
@@ -9536,8 +9607,8 @@
           </a:prstGeom>
         </p:spPr>
       </p:pic>
-      <mc:AlternateContent xmlns:mc="http://schemas.openxmlformats.org/markup-compatibility/2006">
-        <mc:Choice xmlns:a14="http://schemas.microsoft.com/office/drawing/2010/main" Requires="a14">
+      <mc:AlternateContent xmlns:mc="http://schemas.openxmlformats.org/markup-compatibility/2006" xmlns:a14="http://schemas.microsoft.com/office/drawing/2010/main">
+        <mc:Choice Requires="a14">
           <p:sp>
             <p:nvSpPr>
               <p:cNvPr id="9" name="TextBox 8">
@@ -9814,7 +9885,7 @@
             </p:txBody>
           </p:sp>
         </mc:Choice>
-        <mc:Fallback>
+        <mc:Fallback xmlns="">
           <p:sp>
             <p:nvSpPr>
               <p:cNvPr id="9" name="TextBox 8">
@@ -9890,8 +9961,8 @@
           <a:chExt cx="0" cy="0"/>
         </a:xfrm>
       </p:grpSpPr>
-      <mc:AlternateContent xmlns:mc="http://schemas.openxmlformats.org/markup-compatibility/2006">
-        <mc:Choice xmlns:a14="http://schemas.microsoft.com/office/drawing/2010/main" Requires="a14">
+      <mc:AlternateContent xmlns:mc="http://schemas.openxmlformats.org/markup-compatibility/2006" xmlns:a14="http://schemas.microsoft.com/office/drawing/2010/main">
+        <mc:Choice Requires="a14">
           <p:sp>
             <p:nvSpPr>
               <p:cNvPr id="281" name="Take a bootstrap sample of the observations…"/>
@@ -10086,7 +10157,7 @@
             </p:txBody>
           </p:sp>
         </mc:Choice>
-        <mc:Fallback>
+        <mc:Fallback xmlns="">
           <p:sp>
             <p:nvSpPr>
               <p:cNvPr id="281" name="Take a bootstrap sample of the observations…"/>
